--- a/media/broadcast/2026-10-20/smb-backup-lab-dev-process-light.pptx
+++ b/media/broadcast/2026-10-20/smb-backup-lab-dev-process-light.pptx
@@ -1915,7 +1915,7 @@
           <a:p/>
           <a:p>
             <a:r>
-              <a:t>오늘 사례의 핵심은 요구가 코드로 이어지고 실행 증거가 다시 다음 작업으로 이어졌다는 점입니다. 기록은 영상을 만들 때도 도움이 됐지만 복구를 준비하고 오류를 재현할 때 더 직접적으로 쓰였습니다. 원본 dev-process-light와 smb-backup-lab 링크는 화면과 설명란에 넣었습니다. 확인하지 않은 부분은 계속 남은 시험으로 표시하겠습니다. 여러분의 작은 프로젝트에서도 이 흐름을 한 번 적용해 보시면 좋겠습니다.</a:t>
+              <a:t>오늘 사례의 핵심은 요구가 코드로 이어지고 실행 증거가 다시 다음 작업으로 이어졌다는 점입니다. 기록은 영상을 만들 때도 도움이 됐지만 복구를 준비하고 오류를 재현할 때 더 직접적으로 쓰였습니다. 원본 dev-process-light와 smb-backup-lab 링크는 화면과 설명란에 넣었습니다. 확인하지 않은 부분은 계속 남은 시험으로 표시하겠습니다. 여러분의 작은 프로젝트에서도 이 흐름을 한 번 적용해 보시면 좋겠습니다. 원본 개발 규칙: https://github.com/edubeom/dev-process-light . 짝 데이터 설계 스킬: https://github.com/edubeom/data-expert-framework-light .</a:t>
             </a:r>
           </a:p>
         </p:txBody>
